--- a/deliverables/DIY-Amplifier-Story-Edition.pptx
+++ b/deliverables/DIY-Amplifier-Story-Edition.pptx
@@ -16863,7 +16863,7 @@
               </a:defRPr>
             </a:pPr>
             <a:r>
-              <a:t>“你说什么？”</a:t>
+              <a:t>听不清！</a:t>
             </a:r>
           </a:p>
         </p:txBody>
